--- a/dist/第3回/第3回_スライド_TCPサーバとServerSocket.pptx
+++ b/dist/第3回/第3回_スライド_TCPサーバとServerSocket.pptx
@@ -526,7 +526,7 @@
           <a:p>
             <a:r>
               <a:rPr lang="ja-JP" altLang="en-US" dirty="0"/>
-              <a:t>第1回・第2回で、ずっと EchoServer.jar に接続してきました。今日はその中身を自分で書きます。最後に言えるようになってほしいのは、「つながったことと、相手をしてもらえることは別」ということです。</a:t>
+              <a:t/>
             </a:r>
             <a:endParaRPr lang="ja-JP" altLang="en-US" dirty="0"/>
           </a:p>
@@ -549,7 +549,7 @@
           <a:p>
             <a:fld id="{F7021451-1387-4CA6-816F-3879F97B5CBC}" type="slidenum">
               <a:rPr lang="ja-JP" altLang="en-US"/>
-              <a:t>1</a:t>
+              <a:t/>
             </a:fld>
             <a:endParaRPr lang="ja-JP" altLang="en-US"/>
           </a:p>
@@ -614,7 +614,7 @@
           <a:p>
             <a:r>
               <a:rPr lang="ja-JP" altLang="en-US" dirty="0"/>
-              <a:t>ここで答えは言いません。学生にこのページへ予想を1文で書かせてください。演習Cの直前に読み返させ、C-2 のあとで自分で採点させます。主語が「サーバ」で「返事が来ない」と書けていれば合格です。</a:t>
+              <a:t/>
             </a:r>
             <a:endParaRPr lang="ja-JP" altLang="en-US" dirty="0"/>
           </a:p>
@@ -637,7 +637,7 @@
           <a:p>
             <a:fld id="{F7021451-1387-4CA6-816F-3879F97B5CBC}" type="slidenum">
               <a:rPr lang="ja-JP" altLang="en-US"/>
-              <a:t>10</a:t>
+              <a:t/>
             </a:fld>
             <a:endParaRPr lang="ja-JP" altLang="en-US"/>
           </a:p>
@@ -702,7 +702,7 @@
           <a:p>
             <a:r>
               <a:rPr lang="ja-JP" altLang="en-US" dirty="0"/>
-              <a:t>配布の OneShot.java と Talk.java をコンパイルして動かします。サーバ側は LISTENING と出たまま止まります。それが正常です。</a:t>
+              <a:t/>
             </a:r>
             <a:endParaRPr lang="ja-JP" altLang="en-US" dirty="0"/>
           </a:p>
@@ -725,7 +725,7 @@
           <a:p>
             <a:fld id="{F7021451-1387-4CA6-816F-3879F97B5CBC}" type="slidenum">
               <a:rPr lang="ja-JP" altLang="en-US"/>
-              <a:t>11</a:t>
+              <a:t/>
             </a:fld>
             <a:endParaRPr lang="ja-JP" altLang="en-US"/>
           </a:p>
@@ -790,7 +790,7 @@
           <a:p>
             <a:r>
               <a:rPr lang="ja-JP" altLang="en-US" dirty="0"/>
-              <a:t>サーバは1人相手にしたら、受付ごと閉じて終了します。もう一度 Talk を実行すると REFUSED、netstat からも消えます。第1回で EchoServer を止めたときと同じことを、自分のコードで起こしました。</a:t>
+              <a:t/>
             </a:r>
             <a:endParaRPr lang="ja-JP" altLang="en-US" dirty="0"/>
           </a:p>
@@ -813,7 +813,7 @@
           <a:p>
             <a:fld id="{F7021451-1387-4CA6-816F-3879F97B5CBC}" type="slidenum">
               <a:rPr lang="ja-JP" altLang="en-US"/>
-              <a:t>12</a:t>
+              <a:t/>
             </a:fld>
             <a:endParaRPr lang="ja-JP" altLang="en-US"/>
           </a:p>
@@ -878,7 +878,7 @@
           <a:p>
             <a:r>
               <a:rPr lang="ja-JP" altLang="en-US" dirty="0"/>
-              <a:t>OneShot をコピーして LoopServer を作ります。ポイントは3つ。特に3つ目、catch を while(true) の内側に置くことが、今日いちばん実務に近いところです。</a:t>
+              <a:t/>
             </a:r>
             <a:endParaRPr lang="ja-JP" altLang="en-US" dirty="0"/>
           </a:p>
@@ -901,7 +901,7 @@
           <a:p>
             <a:fld id="{F7021451-1387-4CA6-816F-3879F97B5CBC}" type="slidenum">
               <a:rPr lang="ja-JP" altLang="en-US"/>
-              <a:t>13</a:t>
+              <a:t/>
             </a:fld>
             <a:endParaRPr lang="ja-JP" altLang="en-US"/>
           </a:p>
@@ -966,7 +966,7 @@
           <a:p>
             <a:r>
               <a:rPr lang="ja-JP" altLang="en-US" dirty="0"/>
-              <a:t>Talk を3回つないでは止めます。ACCEPTED の最後の数字が毎回変わるのを確かめさせてください。OS が接続する側に自動で割り当てた番号です。</a:t>
+              <a:t/>
             </a:r>
             <a:endParaRPr lang="ja-JP" altLang="en-US" dirty="0"/>
           </a:p>
@@ -989,7 +989,7 @@
           <a:p>
             <a:fld id="{F7021451-1387-4CA6-816F-3879F97B5CBC}" type="slidenum">
               <a:rPr lang="ja-JP" altLang="en-US"/>
-              <a:t>14</a:t>
+              <a:t/>
             </a:fld>
             <a:endParaRPr lang="ja-JP" altLang="en-US"/>
           </a:p>
@@ -1054,7 +1054,7 @@
           <a:p>
             <a:r>
               <a:rPr lang="ja-JP" altLang="en-US" dirty="0"/>
-              <a:t>ここで全員の手を止めて、一緒にやります。ターミナル(3)で2つ目を起動して BindException を出します。今日から Address already in use を見たら、前に起動したサーバがまだ生きていると読む、と言ってください。止め方の3行もここで見せます。</a:t>
+              <a:t/>
             </a:r>
             <a:endParaRPr lang="ja-JP" altLang="en-US" dirty="0"/>
           </a:p>
@@ -1077,7 +1077,7 @@
           <a:p>
             <a:fld id="{F7021451-1387-4CA6-816F-3879F97B5CBC}" type="slidenum">
               <a:rPr lang="ja-JP" altLang="en-US"/>
-              <a:t>15</a:t>
+              <a:t/>
             </a:fld>
             <a:endParaRPr lang="ja-JP" altLang="en-US"/>
           </a:p>
@@ -1142,7 +1142,7 @@
           <a:p>
             <a:r>
               <a:rPr lang="ja-JP" altLang="en-US" dirty="0"/>
-              <a:t>ここで全員の手を止めます。先に、スライド10に書いた予想を読み返させてから動かしてください。順番を守らせること。入力は半角英数字。</a:t>
+              <a:t/>
             </a:r>
             <a:endParaRPr lang="ja-JP" altLang="en-US" dirty="0"/>
           </a:p>
@@ -1165,7 +1165,7 @@
           <a:p>
             <a:fld id="{F7021451-1387-4CA6-816F-3879F97B5CBC}" type="slidenum">
               <a:rPr lang="ja-JP" altLang="en-US"/>
-              <a:t>16</a:t>
+              <a:t/>
             </a:fld>
             <a:endParaRPr lang="ja-JP" altLang="en-US"/>
           </a:p>
@@ -1230,7 +1230,7 @@
           <a:p>
             <a:r>
               <a:rPr lang="ja-JP" altLang="en-US" dirty="0"/>
-              <a:t>2人目でも CONNECTED は出ます。TCPの接続は OS が先に済ませているからです。でもプログラムは2回目の accept をまだ呼んでいないので、その接続があることを知りません。</a:t>
+              <a:t/>
             </a:r>
             <a:endParaRPr lang="ja-JP" altLang="en-US" dirty="0"/>
           </a:p>
@@ -1253,7 +1253,7 @@
           <a:p>
             <a:fld id="{F7021451-1387-4CA6-816F-3879F97B5CBC}" type="slidenum">
               <a:rPr lang="ja-JP" altLang="en-US"/>
-              <a:t>17</a:t>
+              <a:t/>
             </a:fld>
             <a:endParaRPr lang="ja-JP" altLang="en-US"/>
           </a:p>
@@ -1318,7 +1318,7 @@
           <a:p>
             <a:r>
               <a:rPr lang="ja-JP" altLang="en-US" dirty="0"/>
-              <a:t>ここで予想の答え合わせをさせます。2人目の画面に返事が来ない、と書けていれば合格。REFUSED やエラーと書いた人は、接続とプログラムの処理を混同しています。そこが第4回の入口です。</a:t>
+              <a:t/>
             </a:r>
             <a:endParaRPr lang="ja-JP" altLang="en-US" dirty="0"/>
           </a:p>
@@ -1341,7 +1341,7 @@
           <a:p>
             <a:fld id="{F7021451-1387-4CA6-816F-3879F97B5CBC}" type="slidenum">
               <a:rPr lang="ja-JP" altLang="en-US"/>
-              <a:t>18</a:t>
+              <a:t/>
             </a:fld>
             <a:endParaRPr lang="ja-JP" altLang="en-US"/>
           </a:p>
@@ -1406,7 +1406,7 @@
           <a:p>
             <a:r>
               <a:rPr lang="ja-JP" altLang="en-US" dirty="0"/>
-              <a:t>余裕があれば。課題には含みません。ファイアウォールの許可画面が出たら、管理者権限が要るのでキャンセルさせてください。A〜Cと課題には影響しません。</a:t>
+              <a:t/>
             </a:r>
             <a:endParaRPr lang="ja-JP" altLang="en-US" dirty="0"/>
           </a:p>
@@ -1429,7 +1429,7 @@
           <a:p>
             <a:fld id="{F7021451-1387-4CA6-816F-3879F97B5CBC}" type="slidenum">
               <a:rPr lang="ja-JP" altLang="en-US"/>
-              <a:t>19</a:t>
+              <a:t/>
             </a:fld>
             <a:endParaRPr lang="ja-JP" altLang="en-US"/>
           </a:p>
@@ -1494,7 +1494,7 @@
           <a:p>
             <a:r>
               <a:rPr lang="ja-JP" altLang="en-US" dirty="0"/>
-              <a:t>第1回と第2回は、つなぎに行く側でした。待っている相手はずっと EchoServer.jar でした。今日はその相手を書きます。</a:t>
+              <a:t/>
             </a:r>
             <a:endParaRPr lang="ja-JP" altLang="en-US" dirty="0"/>
           </a:p>
@@ -1517,7 +1517,7 @@
           <a:p>
             <a:fld id="{F7021451-1387-4CA6-816F-3879F97B5CBC}" type="slidenum">
               <a:rPr lang="ja-JP" altLang="en-US"/>
-              <a:t>2</a:t>
+              <a:t/>
             </a:fld>
             <a:endParaRPr lang="ja-JP" altLang="en-US"/>
           </a:p>
@@ -1582,7 +1582,7 @@
           <a:p>
             <a:r>
               <a:rPr lang="ja-JP" altLang="en-US" dirty="0"/>
-              <a:t>課題は LineServer.java、全2問です。問1で何を返すか、問2で何をされても死なないことを仕上げます。LEN は第2回の回収です。</a:t>
+              <a:t/>
             </a:r>
             <a:endParaRPr lang="ja-JP" altLang="en-US" dirty="0"/>
           </a:p>
@@ -1605,7 +1605,7 @@
           <a:p>
             <a:fld id="{F7021451-1387-4CA6-816F-3879F97B5CBC}" type="slidenum">
               <a:rPr lang="ja-JP" altLang="en-US"/>
-              <a:t>20</a:t>
+              <a:t/>
             </a:fld>
             <a:endParaRPr lang="ja-JP" altLang="en-US"/>
           </a:p>
@@ -1670,7 +1670,7 @@
           <a:p>
             <a:r>
               <a:rPr lang="ja-JP" altLang="en-US" dirty="0"/>
-              <a:t>問1はケース1から5です。LEN は第2回の回収で、文字数ではなくバイト数。ECHO は trim しない。コマンド名は大文字だけを認めます。</a:t>
+              <a:t/>
             </a:r>
             <a:endParaRPr lang="ja-JP" altLang="en-US" dirty="0"/>
           </a:p>
@@ -1693,7 +1693,7 @@
           <a:p>
             <a:fld id="{F7021451-1387-4CA6-816F-3879F97B5CBC}" type="slidenum">
               <a:rPr lang="ja-JP" altLang="en-US"/>
-              <a:t>21</a:t>
+              <a:t/>
             </a:fld>
             <a:endParaRPr lang="ja-JP" altLang="en-US"/>
           </a:p>
@@ -1758,7 +1758,7 @@
           <a:p>
             <a:r>
               <a:rPr lang="ja-JP" altLang="en-US" dirty="0"/>
-              <a:t>問2はケース6から9で、ここが課題の中心です。QUIT で閉じるのはその接続だけ。採点スクリプトはわざと乱暴に切断します。catch が while(true) の外側にあると、強制切断の1回でサーバが止まります。</a:t>
+              <a:t/>
             </a:r>
             <a:endParaRPr lang="ja-JP" altLang="en-US" dirty="0"/>
           </a:p>
@@ -1781,7 +1781,7 @@
           <a:p>
             <a:fld id="{F7021451-1387-4CA6-816F-3879F97B5CBC}" type="slidenum">
               <a:rPr lang="ja-JP" altLang="en-US"/>
-              <a:t>22</a:t>
+              <a:t/>
             </a:fld>
             <a:endParaRPr lang="ja-JP" altLang="en-US"/>
           </a:p>
@@ -1846,7 +1846,7 @@
           <a:p>
             <a:r>
               <a:rPr lang="ja-JP" altLang="en-US" dirty="0"/>
-              <a:t>模範解答の LEN を length に変えた版で実演します。ケース4だけが FAIL になり、expected と got が出ます。赤い FAIL は故障ではないと言ってください。自分のサーバを止めてから実行すること。</a:t>
+              <a:t/>
             </a:r>
             <a:endParaRPr lang="ja-JP" altLang="en-US" dirty="0"/>
           </a:p>
@@ -1869,7 +1869,7 @@
           <a:p>
             <a:fld id="{F7021451-1387-4CA6-816F-3879F97B5CBC}" type="slidenum">
               <a:rPr lang="ja-JP" altLang="en-US"/>
-              <a:t>23</a:t>
+              <a:t/>
             </a:fld>
             <a:endParaRPr lang="ja-JP" altLang="en-US"/>
           </a:p>
@@ -1934,7 +1934,7 @@
           <a:p>
             <a:r>
               <a:rPr lang="ja-JP" altLang="en-US" dirty="0"/>
-              <a:t>教室を出る前に1ケースでも PASS を出させてください。スクリプトがそもそも動かない学生は、ここで拾います。</a:t>
+              <a:t/>
             </a:r>
             <a:endParaRPr lang="ja-JP" altLang="en-US" dirty="0"/>
           </a:p>
@@ -1957,7 +1957,7 @@
           <a:p>
             <a:fld id="{F7021451-1387-4CA6-816F-3879F97B5CBC}" type="slidenum">
               <a:rPr lang="ja-JP" altLang="en-US"/>
-              <a:t>24</a:t>
+              <a:t/>
             </a:fld>
             <a:endParaRPr lang="ja-JP" altLang="en-US"/>
           </a:p>
@@ -2022,7 +2022,7 @@
           <a:p>
             <a:r>
               <a:rPr lang="ja-JP" altLang="en-US" dirty="0"/>
-              <a:t>最後に学生に声に出して読ませてください。これが今日の軸文です。次回は、今日待たされた2人目を待たせないサーバを作ります。</a:t>
+              <a:t/>
             </a:r>
             <a:endParaRPr lang="ja-JP" altLang="en-US" dirty="0"/>
           </a:p>
@@ -2045,7 +2045,7 @@
           <a:p>
             <a:fld id="{F7021451-1387-4CA6-816F-3879F97B5CBC}" type="slidenum">
               <a:rPr lang="ja-JP" altLang="en-US"/>
-              <a:t>25</a:t>
+              <a:t/>
             </a:fld>
             <a:endParaRPr lang="ja-JP" altLang="en-US"/>
           </a:p>
@@ -2110,7 +2110,7 @@
           <a:p>
             <a:r>
               <a:rPr lang="ja-JP" altLang="en-US" dirty="0"/>
-              <a:t>コードの上での違いは1つだけです。サーバだけがクラスを2つ使います。ここが今日いちばん混乱するところなので、次の図で押さえます。</a:t>
+              <a:t/>
             </a:r>
             <a:endParaRPr lang="ja-JP" altLang="en-US" dirty="0"/>
           </a:p>
@@ -2133,7 +2133,7 @@
           <a:p>
             <a:fld id="{F7021451-1387-4CA6-816F-3879F97B5CBC}" type="slidenum">
               <a:rPr lang="ja-JP" altLang="en-US"/>
-              <a:t>3</a:t>
+              <a:t/>
             </a:fld>
             <a:endParaRPr lang="ja-JP" altLang="en-US"/>
           </a:p>
@@ -2198,7 +2198,7 @@
           <a:p>
             <a:r>
               <a:rPr lang="ja-JP" altLang="en-US" dirty="0"/>
-              <a:t>受付は開けたままです。accept が返すたびに、線が1本ずつ増えます。Copilot は ServerSocket から getInputStream を呼ぶコードをときどき出しますが、そんなメソッドはありません。</a:t>
+              <a:t/>
             </a:r>
             <a:endParaRPr lang="ja-JP" altLang="en-US" dirty="0"/>
           </a:p>
@@ -2221,7 +2221,7 @@
           <a:p>
             <a:fld id="{F7021451-1387-4CA6-816F-3879F97B5CBC}" type="slidenum">
               <a:rPr lang="ja-JP" altLang="en-US"/>
-              <a:t>4</a:t>
+              <a:t/>
             </a:fld>
             <a:endParaRPr lang="ja-JP" altLang="en-US"/>
           </a:p>
@@ -2286,7 +2286,7 @@
           <a:p>
             <a:r>
               <a:rPr lang="ja-JP" altLang="en-US" dirty="0"/>
-              <a:t>左の枠が今日書くサーバプログラム、右の枠が第1回・第2回で書いたクライアントプログラムです。サーバは1から4の順に進み、4のあと2に戻ります。accept で止まって見えるのが正常だ、ということを先に言っておきます。</a:t>
+              <a:t/>
             </a:r>
             <a:endParaRPr lang="ja-JP" altLang="en-US" dirty="0"/>
           </a:p>
@@ -2309,7 +2309,7 @@
           <a:p>
             <a:fld id="{F7021451-1387-4CA6-816F-3879F97B5CBC}" type="slidenum">
               <a:rPr lang="ja-JP" altLang="en-US"/>
-              <a:t>5</a:t>
+              <a:t/>
             </a:fld>
             <a:endParaRPr lang="ja-JP" altLang="en-US"/>
           </a:p>
@@ -2374,7 +2374,7 @@
           <a:p>
             <a:r>
               <a:rPr lang="ja-JP" altLang="en-US" dirty="0"/>
-              <a:t>画面に何も出ず、キーボードも効かないので落ちたと思う学生が毎年います。それが正常な待機状態です。止めるときは Ctrl+C。ここで一度言っておきます。</a:t>
+              <a:t/>
             </a:r>
             <a:endParaRPr lang="ja-JP" altLang="en-US" dirty="0"/>
           </a:p>
@@ -2397,7 +2397,7 @@
           <a:p>
             <a:fld id="{F7021451-1387-4CA6-816F-3879F97B5CBC}" type="slidenum">
               <a:rPr lang="ja-JP" altLang="en-US"/>
-              <a:t>6</a:t>
+              <a:t/>
             </a:fld>
             <a:endParaRPr lang="ja-JP" altLang="en-US"/>
           </a:p>
@@ -2462,7 +2462,7 @@
           <a:p>
             <a:r>
               <a:rPr lang="ja-JP" altLang="en-US" dirty="0"/>
-              <a:t>同じ番号は1つのプログラムしか確保できません。だからポート番号は宛先として働きます。演習Bでわざと BindException を出します。netstat では 0.0.0.0 か [::] と出ます。どちらも、どのアドレス宛でも受けるという意味です。</a:t>
+              <a:t/>
             </a:r>
             <a:endParaRPr lang="ja-JP" altLang="en-US" dirty="0"/>
           </a:p>
@@ -2485,7 +2485,7 @@
           <a:p>
             <a:fld id="{F7021451-1387-4CA6-816F-3879F97B5CBC}" type="slidenum">
               <a:rPr lang="ja-JP" altLang="en-US"/>
-              <a:t>7</a:t>
+              <a:t/>
             </a:fld>
             <a:endParaRPr lang="ja-JP" altLang="en-US"/>
           </a:p>
@@ -2550,7 +2550,7 @@
           <a:p>
             <a:r>
               <a:rPr lang="ja-JP" altLang="en-US" dirty="0"/>
-              <a:t>今日から出力を2つに分けます。採点スクリプトは標準出力を読みます。デバッグ用の println が1行でも混ざると落ちます。迷ったら System.err。</a:t>
+              <a:t/>
             </a:r>
             <a:endParaRPr lang="ja-JP" altLang="en-US" dirty="0"/>
           </a:p>
@@ -2573,7 +2573,7 @@
           <a:p>
             <a:fld id="{F7021451-1387-4CA6-816F-3879F97B5CBC}" type="slidenum">
               <a:rPr lang="ja-JP" altLang="en-US"/>
-              <a:t>8</a:t>
+              <a:t/>
             </a:fld>
             <a:endParaRPr lang="ja-JP" altLang="en-US"/>
           </a:p>
@@ -2638,7 +2638,7 @@
           <a:p>
             <a:r>
               <a:rPr lang="ja-JP" altLang="en-US" dirty="0"/>
-              <a:t>サーバのコードで Copilot がよく出す4つです。特にスレッドは、頼んでいないのに出てきます。今日は使いません。</a:t>
+              <a:t/>
             </a:r>
             <a:endParaRPr lang="ja-JP" altLang="en-US" dirty="0"/>
           </a:p>
@@ -2661,7 +2661,7 @@
           <a:p>
             <a:fld id="{F7021451-1387-4CA6-816F-3879F97B5CBC}" type="slidenum">
               <a:rPr lang="ja-JP" altLang="en-US"/>
-              <a:t>9</a:t>
+              <a:t/>
             </a:fld>
             <a:endParaRPr lang="ja-JP" altLang="en-US"/>
           </a:p>
